--- a/Бизнес 4.pptx
+++ b/Бизнес 4.pptx
@@ -5823,77 +5823,73 @@
         </p:nvSpPr>
         <p:spPr>
           <a:xfrm>
-            <a:off x="2476500" y="1589088"/>
+            <a:off x="1980389" y="1589087"/>
             <a:ext cx="8877300" cy="4486275"/>
           </a:xfrm>
         </p:spPr>
         <p:txBody>
           <a:bodyPr>
-            <a:normAutofit/>
+            <a:noAutofit/>
           </a:bodyPr>
           <a:lstStyle/>
           <a:p>
-            <a:pPr>
+            <a:pPr algn="just">
               <a:lnSpc>
                 <a:spcPct val="150000"/>
               </a:lnSpc>
             </a:pPr>
             <a:r>
-              <a:rPr lang="ru-RU" sz="3600" dirty="0">
-                <a:latin typeface="Yu Gothic UI" panose="020B0500000000000000" pitchFamily="34" charset="-128"/>
+              <a:rPr lang="ru-RU" sz="2400" dirty="0">
                 <a:ea typeface="Yu Gothic UI" panose="020B0500000000000000" pitchFamily="34" charset="-128"/>
               </a:rPr>
-              <a:t>Создание веб-сайта</a:t>
-            </a:r>
-          </a:p>
-          <a:p>
-            <a:pPr>
+              <a:t>Создать совместную веб-IDE.</a:t>
+            </a:r>
+          </a:p>
+          <a:p>
+            <a:pPr algn="just">
               <a:lnSpc>
                 <a:spcPct val="150000"/>
               </a:lnSpc>
             </a:pPr>
             <a:r>
-              <a:rPr lang="ru-RU" sz="3600" dirty="0">
-                <a:latin typeface="Yu Gothic UI" panose="020B0500000000000000" pitchFamily="34" charset="-128"/>
+              <a:rPr lang="ru-RU" sz="2400" dirty="0">
                 <a:ea typeface="Yu Gothic UI" panose="020B0500000000000000" pitchFamily="34" charset="-128"/>
               </a:rPr>
-              <a:t>Интеграция </a:t>
-            </a:r>
-            <a:r>
-              <a:rPr lang="en-US" sz="3600" dirty="0">
-                <a:latin typeface="Yu Gothic UI" panose="020B0500000000000000" pitchFamily="34" charset="-128"/>
-                <a:ea typeface="Yu Gothic UI" panose="020B0500000000000000" pitchFamily="34" charset="-128"/>
-              </a:rPr>
-              <a:t>AI</a:t>
-            </a:r>
-            <a:r>
-              <a:rPr lang="ru-RU" sz="3600" dirty="0">
-                <a:latin typeface="Yu Gothic UI" panose="020B0500000000000000" pitchFamily="34" charset="-128"/>
-                <a:ea typeface="Yu Gothic UI" panose="020B0500000000000000" pitchFamily="34" charset="-128"/>
-              </a:rPr>
-              <a:t>-агента</a:t>
-            </a:r>
-          </a:p>
-          <a:p>
-            <a:pPr>
+              <a:t>Интегрировать AI-агента для анализа кода в реальном времени.</a:t>
+            </a:r>
+          </a:p>
+          <a:p>
+            <a:pPr algn="just">
               <a:lnSpc>
                 <a:spcPct val="150000"/>
               </a:lnSpc>
             </a:pPr>
             <a:r>
-              <a:rPr lang="ru-RU" sz="3600" dirty="0">
-                <a:latin typeface="Yu Gothic UI" panose="020B0500000000000000" pitchFamily="34" charset="-128"/>
+              <a:rPr lang="ru-RU" sz="2400" dirty="0">
                 <a:ea typeface="Yu Gothic UI" panose="020B0500000000000000" pitchFamily="34" charset="-128"/>
               </a:rPr>
-              <a:t>Настройка сайта для корректной работы</a:t>
-            </a:r>
-          </a:p>
-          <a:p>
-            <a:pPr marL="0" indent="0">
-              <a:buNone/>
+              <a:t>Обеспечить одновременную работу нескольких студентов в одном файле.</a:t>
+            </a:r>
+          </a:p>
+          <a:p>
+            <a:pPr algn="just">
+              <a:lnSpc>
+                <a:spcPct val="150000"/>
+              </a:lnSpc>
             </a:pPr>
-            <a:endParaRPr lang="ru-RU" dirty="0">
-              <a:latin typeface="Yu Gothic UI" panose="020B0500000000000000" pitchFamily="34" charset="-128"/>
+            <a:r>
+              <a:rPr lang="ru-RU" sz="2400" dirty="0">
+                <a:ea typeface="Yu Gothic UI" panose="020B0500000000000000" pitchFamily="34" charset="-128"/>
+              </a:rPr>
+              <a:t>Предоставить песочницу для выполнения кода прямо </a:t>
+            </a:r>
+            <a:r>
+              <a:rPr lang="ru-RU" sz="2400">
+                <a:ea typeface="Yu Gothic UI" panose="020B0500000000000000" pitchFamily="34" charset="-128"/>
+              </a:rPr>
+              <a:t>в браузере.</a:t>
+            </a:r>
+            <a:endParaRPr lang="ru-RU" sz="2400" dirty="0">
               <a:ea typeface="Yu Gothic UI" panose="020B0500000000000000" pitchFamily="34" charset="-128"/>
             </a:endParaRPr>
           </a:p>
@@ -5927,7 +5923,7 @@
         </p:blipFill>
         <p:spPr>
           <a:xfrm>
-            <a:off x="1564386" y="1842558"/>
+            <a:off x="1259542" y="1846474"/>
             <a:ext cx="609685" cy="609685"/>
           </a:xfrm>
           <a:prstGeom prst="rect">
@@ -5963,7 +5959,7 @@
         </p:blipFill>
         <p:spPr>
           <a:xfrm>
-            <a:off x="1564385" y="2819315"/>
+            <a:off x="1258336" y="2819315"/>
             <a:ext cx="609685" cy="609685"/>
           </a:xfrm>
           <a:prstGeom prst="rect">
@@ -5999,7 +5995,7 @@
         </p:blipFill>
         <p:spPr>
           <a:xfrm>
-            <a:off x="1564385" y="3864112"/>
+            <a:off x="1258336" y="3832225"/>
             <a:ext cx="609685" cy="609685"/>
           </a:xfrm>
           <a:prstGeom prst="rect">
